--- a/StellarEscrow_Pitch_Deck.pptx
+++ b/StellarEscrow_Pitch_Deck.pptx
@@ -4696,7 +4696,7 @@
               </a:defRPr>
             </a:pPr>
             <a:r>
-              <a:t>Live Demo: [DEMO_LINK]  •  GitHub: [GITHUB_LINK]</a:t>
+              <a:t>Live Demo: stellar-escrowlevel-5.vercel.app  •  GitHub: github.com/shwetasharma44044-eng/StellarEscrowlevel-5</a:t>
             </a:r>
           </a:p>
           <a:p>
@@ -6756,16 +6756,40 @@
           </a:p>
         </p:txBody>
       </p:sp>
-      <p:sp>
-        <p:nvSpPr>
-          <p:cNvPr id="6" name="Rounded Rectangle 5"/>
+      <p:pic>
+        <p:nvPicPr>
+          <p:cNvPr id="6" name="Picture 5" descr="image-6.png"/>
+          <p:cNvPicPr>
+            <a:picLocks noChangeAspect="1"/>
+          </p:cNvPicPr>
+          <p:nvPr/>
+        </p:nvPicPr>
+        <p:blipFill>
+          <a:blip r:embed="rId2"/>
+          <a:stretch>
+            <a:fillRect/>
+          </a:stretch>
+        </p:blipFill>
+        <p:spPr>
+          <a:xfrm>
+            <a:off x="731520" y="1828800"/>
+            <a:ext cx="3291840" cy="2103120"/>
+          </a:xfrm>
+          <a:prstGeom prst="rect">
+            <a:avLst/>
+          </a:prstGeom>
+        </p:spPr>
+      </p:pic>
+      <p:sp>
+        <p:nvSpPr>
+          <p:cNvPr id="7" name="Rounded Rectangle 6"/>
           <p:cNvSpPr/>
           <p:nvPr/>
         </p:nvSpPr>
         <p:spPr>
           <a:xfrm>
-            <a:off x="731520" y="1828800"/>
-            <a:ext cx="3291840" cy="4114800"/>
+            <a:off x="731520" y="4114800"/>
+            <a:ext cx="3291840" cy="1828800"/>
           </a:xfrm>
           <a:prstGeom prst="roundRect">
             <a:avLst/>
@@ -6803,14 +6827,14 @@
       </p:sp>
       <p:sp>
         <p:nvSpPr>
-          <p:cNvPr id="7" name="TextBox 6"/>
+          <p:cNvPr id="8" name="TextBox 7"/>
           <p:cNvSpPr txBox="1"/>
           <p:nvPr/>
         </p:nvSpPr>
         <p:spPr>
           <a:xfrm>
-            <a:off x="914400" y="2011680"/>
-            <a:ext cx="2926080" cy="3749040"/>
+            <a:off x="914400" y="4297680"/>
+            <a:ext cx="2926080" cy="1463040"/>
           </a:xfrm>
           <a:prstGeom prst="rect">
             <a:avLst/>
@@ -6832,7 +6856,7 @@
               </a:defRPr>
             </a:pPr>
             <a:r>
-              <a:t>[SCREENSHOT: client creating a project]</a:t>
+              <a:t>1. Dashboard Overviews</a:t>
             </a:r>
           </a:p>
           <a:p>
@@ -6848,37 +6872,45 @@
               </a:defRPr>
             </a:pPr>
             <a:r>
-              <a:t>Step 1: Setup Escrow Contract</a:t>
-            </a:r>
-          </a:p>
-          <a:p>
-            <a:pPr>
-              <a:spcBef>
-                <a:spcPts val="800"/>
-              </a:spcBef>
-              <a:defRPr sz="1300">
-                <a:solidFill>
-                  <a:srgbClr val="F3F4F6"/>
-                </a:solidFill>
-                <a:latin typeface="Calibri"/>
-              </a:defRPr>
-            </a:pPr>
-            <a:r>
-              <a:t>The client defines the milestones, deadline dates, and Freelancer/Arbiter public keys to deploy the contract on-chain.</a:t>
-            </a:r>
-          </a:p>
-        </p:txBody>
-      </p:sp>
-      <p:sp>
-        <p:nvSpPr>
-          <p:cNvPr id="8" name="Rounded Rectangle 7"/>
+              <a:t>The client/freelancer sees active escrow milestones, on-chain balances, and custom visual statuses.</a:t>
+            </a:r>
+          </a:p>
+        </p:txBody>
+      </p:sp>
+      <p:pic>
+        <p:nvPicPr>
+          <p:cNvPr id="9" name="Picture 8" descr="image-5.png"/>
+          <p:cNvPicPr>
+            <a:picLocks noChangeAspect="1"/>
+          </p:cNvPicPr>
+          <p:nvPr/>
+        </p:nvPicPr>
+        <p:blipFill>
+          <a:blip r:embed="rId3"/>
+          <a:stretch>
+            <a:fillRect/>
+          </a:stretch>
+        </p:blipFill>
+        <p:spPr>
+          <a:xfrm>
+            <a:off x="4389120" y="1828800"/>
+            <a:ext cx="3291840" cy="2103120"/>
+          </a:xfrm>
+          <a:prstGeom prst="rect">
+            <a:avLst/>
+          </a:prstGeom>
+        </p:spPr>
+      </p:pic>
+      <p:sp>
+        <p:nvSpPr>
+          <p:cNvPr id="10" name="Rounded Rectangle 9"/>
           <p:cNvSpPr/>
           <p:nvPr/>
         </p:nvSpPr>
         <p:spPr>
           <a:xfrm>
-            <a:off x="4389120" y="1828800"/>
-            <a:ext cx="3291840" cy="4114800"/>
+            <a:off x="4389120" y="4114800"/>
+            <a:ext cx="3291840" cy="1828800"/>
           </a:xfrm>
           <a:prstGeom prst="roundRect">
             <a:avLst/>
@@ -6916,14 +6948,14 @@
       </p:sp>
       <p:sp>
         <p:nvSpPr>
-          <p:cNvPr id="9" name="TextBox 8"/>
+          <p:cNvPr id="11" name="TextBox 10"/>
           <p:cNvSpPr txBox="1"/>
           <p:nvPr/>
         </p:nvSpPr>
         <p:spPr>
           <a:xfrm>
-            <a:off x="4572000" y="2011680"/>
-            <a:ext cx="2926080" cy="3749040"/>
+            <a:off x="4572000" y="4297680"/>
+            <a:ext cx="2926080" cy="1463040"/>
           </a:xfrm>
           <a:prstGeom prst="rect">
             <a:avLst/>
@@ -6945,7 +6977,7 @@
               </a:defRPr>
             </a:pPr>
             <a:r>
-              <a:t>[SCREENSHOT: milestone funding]</a:t>
+              <a:t>2. Guided Onboarding</a:t>
             </a:r>
           </a:p>
           <a:p>
@@ -6961,37 +6993,45 @@
               </a:defRPr>
             </a:pPr>
             <a:r>
-              <a:t>Step 2: Lock Milestone Funds</a:t>
-            </a:r>
-          </a:p>
-          <a:p>
-            <a:pPr>
-              <a:spcBef>
-                <a:spcPts val="800"/>
-              </a:spcBef>
-              <a:defRPr sz="1300">
-                <a:solidFill>
-                  <a:srgbClr val="F3F4F6"/>
-                </a:solidFill>
-                <a:latin typeface="Calibri"/>
-              </a:defRPr>
-            </a:pPr>
-            <a:r>
-              <a:t>The client locks XLM tokens inside the escrow card. Funding states update instantly via Soroban events.</a:t>
-            </a:r>
-          </a:p>
-        </p:txBody>
-      </p:sp>
-      <p:sp>
-        <p:nvSpPr>
-          <p:cNvPr id="10" name="Rounded Rectangle 9"/>
+              <a:t>Interactive tutorial directs first-time Web3 users to install Freighter and get test XLM from Friendbot.</a:t>
+            </a:r>
+          </a:p>
+        </p:txBody>
+      </p:sp>
+      <p:pic>
+        <p:nvPicPr>
+          <p:cNvPr id="12" name="Picture 11" descr="image-7.png"/>
+          <p:cNvPicPr>
+            <a:picLocks noChangeAspect="1"/>
+          </p:cNvPicPr>
+          <p:nvPr/>
+        </p:nvPicPr>
+        <p:blipFill>
+          <a:blip r:embed="rId4"/>
+          <a:stretch>
+            <a:fillRect/>
+          </a:stretch>
+        </p:blipFill>
+        <p:spPr>
+          <a:xfrm>
+            <a:off x="8046720" y="1828800"/>
+            <a:ext cx="3291840" cy="2103120"/>
+          </a:xfrm>
+          <a:prstGeom prst="rect">
+            <a:avLst/>
+          </a:prstGeom>
+        </p:spPr>
+      </p:pic>
+      <p:sp>
+        <p:nvSpPr>
+          <p:cNvPr id="13" name="Rounded Rectangle 12"/>
           <p:cNvSpPr/>
           <p:nvPr/>
         </p:nvSpPr>
         <p:spPr>
           <a:xfrm>
-            <a:off x="8046720" y="1828800"/>
-            <a:ext cx="3291840" cy="4114800"/>
+            <a:off x="8046720" y="4114800"/>
+            <a:ext cx="3291840" cy="1828800"/>
           </a:xfrm>
           <a:prstGeom prst="roundRect">
             <a:avLst/>
@@ -7029,14 +7069,14 @@
       </p:sp>
       <p:sp>
         <p:nvSpPr>
-          <p:cNvPr id="11" name="TextBox 10"/>
+          <p:cNvPr id="14" name="TextBox 13"/>
           <p:cNvSpPr txBox="1"/>
           <p:nvPr/>
         </p:nvSpPr>
         <p:spPr>
           <a:xfrm>
-            <a:off x="8229600" y="2011680"/>
-            <a:ext cx="2926080" cy="3749040"/>
+            <a:off x="8229600" y="4297680"/>
+            <a:ext cx="2926080" cy="1463040"/>
           </a:xfrm>
           <a:prstGeom prst="rect">
             <a:avLst/>
@@ -7058,7 +7098,7 @@
               </a:defRPr>
             </a:pPr>
             <a:r>
-              <a:t>[SCREENSHOT: mobile view]</a:t>
+              <a:t>3. Verified Telemetry</a:t>
             </a:r>
           </a:p>
           <a:p>
@@ -7074,23 +7114,7 @@
               </a:defRPr>
             </a:pPr>
             <a:r>
-              <a:t>Step 3: Responsive Signatures</a:t>
-            </a:r>
-          </a:p>
-          <a:p>
-            <a:pPr>
-              <a:spcBef>
-                <a:spcPts val="800"/>
-              </a:spcBef>
-              <a:defRPr sz="1300">
-                <a:solidFill>
-                  <a:srgbClr val="F3F4F6"/>
-                </a:solidFill>
-                <a:latin typeface="Calibri"/>
-              </a:defRPr>
-            </a:pPr>
-            <a:r>
-              <a:t>Freelancers mark deliverables as complete, and client approves or disputes via a mobile-first responsive layout.</a:t>
+              <a:t>Integrated event trackers monitor active user funnels and Soroban ledger transactions live.</a:t>
             </a:r>
           </a:p>
         </p:txBody>
@@ -8220,7 +8244,7 @@
               </a:defRPr>
             </a:pPr>
             <a:r>
-              <a:t>• Market Size: [MARKET_SIZE_STAT] (to be updated with current audited global gig-economy metrics).</a:t>
+              <a:t>• Market Size: Projections reach $455 Billion by Mastercard gig economy studies.</a:t>
             </a:r>
           </a:p>
           <a:p>
@@ -8628,7 +8652,7 @@
               </a:defRPr>
             </a:pPr>
             <a:r>
-              <a:t>[USER_COUNT]+</a:t>
+              <a:t>55+</a:t>
             </a:r>
           </a:p>
           <a:p>
@@ -8696,7 +8720,7 @@
               </a:defRPr>
             </a:pPr>
             <a:r>
-              <a:t>[TRANSACTION_COUNT]+</a:t>
+              <a:t>72+</a:t>
             </a:r>
           </a:p>
           <a:p>
@@ -8764,7 +8788,7 @@
               </a:defRPr>
             </a:pPr>
             <a:r>
-              <a:t>[FEEDBACK_RATING] / 5</a:t>
+              <a:t>4.8 / 5</a:t>
             </a:r>
           </a:p>
           <a:p>
